--- a/Final_Revision/Exam_Practice/FR-L01_Writing_Workshop_Daily_Life_Food_and_Health.pptx
+++ b/Final_Revision/Exam_Practice/FR-L01_Writing_Workshop_Daily_Life_Food_and_Health.pptx
@@ -784,7 +784,11 @@
           <a:lstStyle/>
           <a:p>
             <a:r>
-              <a:rPr lang="en-US" dirty="0"/>
+              <a:rPr lang="ar-SA" dirty="0">
+                <a:latin typeface="Amiri" pitchFamily="2" charset="-78"/>
+                <a:ea typeface="Amiri" pitchFamily="2" charset="-78"/>
+                <a:cs typeface="Amiri" pitchFamily="2" charset="-78"/>
+              </a:rPr>
               <a:t>Q3 (3 min to choose and read). Title (أ) suits Core and Develop; title (ب) suits Stretch.</a:t>
             </a:r>
             <a:endParaRPr lang="en-US" dirty="0"/>
@@ -1403,7 +1407,11 @@
           <a:lstStyle/>
           <a:p>
             <a:r>
-              <a:rPr lang="en-US" dirty="0"/>
+              <a:rPr lang="ar-SA" dirty="0">
+                <a:latin typeface="Amiri" pitchFamily="2" charset="-78"/>
+                <a:ea typeface="Amiri" pitchFamily="2" charset="-78"/>
+                <a:cs typeface="Amiri" pitchFamily="2" charset="-78"/>
+              </a:rPr>
               <a:t>WELCOME (1 min) — while students join.
 • Greet each student by name as they arrive: السَّلَامُ عَلَيْكُمْ. Take the register (Pastoral Tracker: attendance 0/1).
 • 2-MINUTE CHECK-IN (SEND training): a private chat to any student who seemed unsettled last lesson — “Are you okay today? 👍 / 👎”.
@@ -1936,7 +1944,11 @@
           <a:lstStyle/>
           <a:p>
             <a:r>
-              <a:rPr lang="en-US" dirty="0"/>
+              <a:rPr lang="ar-SA" dirty="0">
+                <a:latin typeface="Amiri" pitchFamily="2" charset="-78"/>
+                <a:ea typeface="Amiri" pitchFamily="2" charset="-78"/>
+                <a:cs typeface="Amiri" pitchFamily="2" charset="-78"/>
+              </a:rPr>
               <a:t>Question words: مَتَى (when → a time) · كَيْفَ (how → by bus / on foot) · غَيَّرْتَ (you changed — PAST) · لِمَاذَا (why → لِأَنَّ) · خِطَطُكَ (plans — FUTURE).</a:t>
             </a:r>
             <a:endParaRPr lang="en-US" dirty="0"/>
@@ -2508,6 +2520,7 @@
                   <a:srgbClr val="D4AF37"/>
                 </a:solidFill>
                 <a:latin typeface="Amiri" pitchFamily="2" charset="-78"/>
+                <a:ea typeface="Amiri" pitchFamily="2" charset="-78"/>
                 <a:cs typeface="Amiri" pitchFamily="2" charset="-78"/>
               </a:rPr>
               <a:t>م</a:t>
@@ -2714,6 +2727,7 @@
                   <a:srgbClr val="D4AF37"/>
                 </a:solidFill>
                 <a:latin typeface="Amiri" pitchFamily="2" charset="-78"/>
+                <a:ea typeface="Amiri" pitchFamily="2" charset="-78"/>
                 <a:cs typeface="Amiri" pitchFamily="2" charset="-78"/>
               </a:rPr>
               <a:t>وَرْشَةُ الكِتَابَةِ — الحَيَاةُ اليَوْمِيَّةُ وَالطَّعَامُ وَالصِّحَّةُ</a:t>
@@ -3171,6 +3185,7 @@
                   <a:srgbClr val="D4AF37"/>
                 </a:solidFill>
                 <a:latin typeface="Amiri" pitchFamily="2" charset="-78"/>
+                <a:ea typeface="Amiri" pitchFamily="2" charset="-78"/>
                 <a:cs typeface="Amiri" pitchFamily="2" charset="-78"/>
               </a:rPr>
               <a:t>م</a:t>
@@ -3491,6 +3506,7 @@
                   <a:srgbClr val="8A6D1E"/>
                 </a:solidFill>
                 <a:latin typeface="Amiri" pitchFamily="2" charset="-78"/>
+                <a:ea typeface="Amiri" pitchFamily="2" charset="-78"/>
                 <a:cs typeface="Amiri" pitchFamily="2" charset="-78"/>
               </a:rPr>
               <a:t>نَمُوذَجُ الإِجَابَةِ</a:t>
@@ -3604,6 +3620,7 @@
                   <a:srgbClr val="1F2A37"/>
                 </a:solidFill>
                 <a:latin typeface="Amiri" pitchFamily="2" charset="-78"/>
+                <a:ea typeface="Amiri" pitchFamily="2" charset="-78"/>
                 <a:cs typeface="Amiri" pitchFamily="2" charset="-78"/>
               </a:rPr>
               <a:t>مَرْحَبًا يَا مُصْطَفَى،</a:t>
@@ -3623,6 +3640,7 @@
                   <a:srgbClr val="1F2A37"/>
                 </a:solidFill>
                 <a:latin typeface="Amiri" pitchFamily="2" charset="-78"/>
+                <a:ea typeface="Amiri" pitchFamily="2" charset="-78"/>
                 <a:cs typeface="Amiri" pitchFamily="2" charset="-78"/>
               </a:rPr>
               <a:t>كَيْفَ حَالُكَ؟ أُرِيدُ أَنْ أُخْبِرَكَ عَنْ يَوْمِي فِي المَدْرَسَةِ هٰذِهِ السَّنَةَ. أَسْتَيْقِظُ فِي السَّادِسَةِ وَالنِّصْفِ، ثُمَّ أُفْطِرُ البَيْضَ وَالخُبْزَ. أَذْهَبُ إِلَى المَدْرَسَةِ مَشْيًا عَلَى الأَقْدَامِ، وَتَسْتَغْرِقُ الرِّحْلَةُ رُبْعَ سَاعَةٍ. فِي الاسْتِرَاحَةِ آكُلُ الفَوَاكِهَ دَائِمًا، وَلَا أَشْرَبُ المَشْرُوبَاتِ الغَازِيَّةَ أَبَدًا. كُنْتُ أَنَامُ مُتَأَخِّرًا، أَمَّا الآنَ فَأَنَامُ فِي العَاشِرَةِ، لِأَنَّ الامْتِحَانَاتِ قَرِيبَةٌ. أَظُنُّ أَنَّ رُوتِينِي صِحِّيٌّ، وَأَنَا أَقَلُّ تَعَبًا. فِي الصَّيْفِ سَأَلْعَبُ التِّنِسَ كُلَّ يَوْمٍ. وَأَنْتَ، مَتَى تَنَامُ؟</a:t>
@@ -3642,6 +3660,7 @@
                   <a:srgbClr val="1F2A37"/>
                 </a:solidFill>
                 <a:latin typeface="Amiri" pitchFamily="2" charset="-78"/>
+                <a:ea typeface="Amiri" pitchFamily="2" charset="-78"/>
                 <a:cs typeface="Amiri" pitchFamily="2" charset="-78"/>
               </a:rPr>
               <a:t>مَعَ السَّلَامَةِ،</a:t>
@@ -3661,6 +3680,7 @@
                   <a:srgbClr val="1F2A37"/>
                 </a:solidFill>
                 <a:latin typeface="Amiri" pitchFamily="2" charset="-78"/>
+                <a:ea typeface="Amiri" pitchFamily="2" charset="-78"/>
                 <a:cs typeface="Amiri" pitchFamily="2" charset="-78"/>
               </a:rPr>
               <a:t>زَكَرِيَّا</a:t>
@@ -3824,11 +3844,12 @@
               <a:buNone/>
             </a:pPr>
             <a:r>
-              <a:rPr lang="en-US" sz="950" b="1" dirty="0">
+              <a:rPr lang="ar-SA" sz="950" b="1" dirty="0">
                 <a:solidFill>
                   <a:srgbClr val="FFFFFF"/>
                 </a:solidFill>
                 <a:latin typeface="Calibri" pitchFamily="34" charset="0"/>
+                <a:ea typeface="Amiri" pitchFamily="2" charset="-78"/>
                 <a:cs typeface="Amiri" pitchFamily="2" charset="-78"/>
               </a:rPr>
               <a:t>فِي السَّادِسَةِ وَالنِّصْفِ</a:t>
@@ -3889,11 +3910,12 @@
               <a:buNone/>
             </a:pPr>
             <a:r>
-              <a:rPr lang="en-US" sz="950" b="1" dirty="0">
+              <a:rPr lang="ar-SA" sz="950" b="1" dirty="0">
                 <a:solidFill>
                   <a:srgbClr val="FFFFFF"/>
                 </a:solidFill>
                 <a:latin typeface="Calibri" pitchFamily="34" charset="0"/>
+                <a:ea typeface="Amiri" pitchFamily="2" charset="-78"/>
                 <a:cs typeface="Amiri" pitchFamily="2" charset="-78"/>
               </a:rPr>
               <a:t>دَائِمًا … أَبَدًا</a:t>
@@ -3954,11 +3976,12 @@
               <a:buNone/>
             </a:pPr>
             <a:r>
-              <a:rPr lang="en-US" sz="950" b="1" dirty="0">
+              <a:rPr lang="ar-SA" sz="950" b="1" dirty="0">
                 <a:solidFill>
                   <a:srgbClr val="FFFFFF"/>
                 </a:solidFill>
                 <a:latin typeface="Calibri" pitchFamily="34" charset="0"/>
+                <a:ea typeface="Amiri" pitchFamily="2" charset="-78"/>
                 <a:cs typeface="Amiri" pitchFamily="2" charset="-78"/>
               </a:rPr>
               <a:t>كُنْتُ أَنَامُ … أَمَّا الآنَ</a:t>
@@ -4019,11 +4042,12 @@
               <a:buNone/>
             </a:pPr>
             <a:r>
-              <a:rPr lang="en-US" sz="950" b="1" dirty="0">
+              <a:rPr lang="ar-SA" sz="950" b="1" dirty="0">
                 <a:solidFill>
                   <a:srgbClr val="FFFFFF"/>
                 </a:solidFill>
                 <a:latin typeface="Calibri" pitchFamily="34" charset="0"/>
+                <a:ea typeface="Amiri" pitchFamily="2" charset="-78"/>
                 <a:cs typeface="Amiri" pitchFamily="2" charset="-78"/>
               </a:rPr>
               <a:t>سَأَلْعَبُ التِّنِسَ</a:t>
@@ -4157,6 +4181,7 @@
                   <a:srgbClr val="D4AF37"/>
                 </a:solidFill>
                 <a:latin typeface="Amiri" pitchFamily="2" charset="-78"/>
+                <a:ea typeface="Amiri" pitchFamily="2" charset="-78"/>
                 <a:cs typeface="Amiri" pitchFamily="2" charset="-78"/>
               </a:rPr>
               <a:t>م</a:t>
@@ -4477,6 +4502,7 @@
                   <a:srgbClr val="8A6D1E"/>
                 </a:solidFill>
                 <a:latin typeface="Amiri" pitchFamily="2" charset="-78"/>
+                <a:ea typeface="Amiri" pitchFamily="2" charset="-78"/>
                 <a:cs typeface="Amiri" pitchFamily="2" charset="-78"/>
               </a:rPr>
               <a:t>نَمُوذَجُ الإِجَابَةِ</a:t>
@@ -4590,6 +4616,7 @@
                   <a:srgbClr val="1F2A37"/>
                 </a:solidFill>
                 <a:latin typeface="Amiri" pitchFamily="2" charset="-78"/>
+                <a:ea typeface="Amiri" pitchFamily="2" charset="-78"/>
                 <a:cs typeface="Amiri" pitchFamily="2" charset="-78"/>
               </a:rPr>
               <a:t>عَزِيزِي مُصْطَفَى،</a:t>
@@ -4609,6 +4636,7 @@
                   <a:srgbClr val="1F2A37"/>
                 </a:solidFill>
                 <a:latin typeface="Amiri" pitchFamily="2" charset="-78"/>
+                <a:ea typeface="Amiri" pitchFamily="2" charset="-78"/>
                 <a:cs typeface="Amiri" pitchFamily="2" charset="-78"/>
               </a:rPr>
               <a:t>قَرَّرْتُ هٰذِهِ السَّنَةَ أَنْ أُغَيِّرَ رُوتِينِي اسْتِعْدَادًا لِلِامْتِحَانَاتِ، وَأُرِيدُ أَنْ أُخْبِرَكَ بِالنَّتِيجَةِ. صِرْتُ أَسْتَيْقِظُ فِي السَّادِسَةِ وَالنِّصْفِ، فَأُصَلِّي وَأُفْطِرُ فُطُورًا حَقِيقِيًّا بَدَلًا مِنْ قِطْعَةِ بَسْكَوِيتٍ أَمَامَ الشَّاشَةِ. ثُمَّ أَمْشِي إِلَى المَدْرَسَةِ رُبْعَ سَاعَةٍ، مِمَّا يُنْعِشُنِي قَبْلَ الحِصَّةِ الأُولَى. وَفِي الاسْتِرَاحَةِ آكُلُ الفَوَاكِهَ دَائِمًا، أَمَّا المَشْرُوبَاتُ الغَازِيَّةُ فَقَدْ تَوَقَّفْتُ عَنْهَا تَمَامًا. صَحِيحٌ أَنَّنِي أَشْتَاقُ إِلَى السَّهَرِ أَحْيَانًا، غَيْرَ أَنَّ تَرْكِيزِي فِي الدُّرُوسِ تَحَسَّنَ كَثِيرًا، وَصِرْتُ أَقَلَّ تَعَبًا. وَإِذَا اسْتَمْرَرْتُ هٰكَذَا، فَسَأَدْخُلُ الامْتِحَانَاتِ بِثِقَةٍ. أَخْبِرْنِي: كَيْفَ تُنَظِّمُ يَوْمَكَ أَنْتَ قَبْلَ الامْتِحَانَاتِ؟</a:t>
@@ -4628,6 +4656,7 @@
                   <a:srgbClr val="1F2A37"/>
                 </a:solidFill>
                 <a:latin typeface="Amiri" pitchFamily="2" charset="-78"/>
+                <a:ea typeface="Amiri" pitchFamily="2" charset="-78"/>
                 <a:cs typeface="Amiri" pitchFamily="2" charset="-78"/>
               </a:rPr>
               <a:t>مَعَ تَحِيَّاتِي،</a:t>
@@ -4647,6 +4676,7 @@
                   <a:srgbClr val="1F2A37"/>
                 </a:solidFill>
                 <a:latin typeface="Amiri" pitchFamily="2" charset="-78"/>
+                <a:ea typeface="Amiri" pitchFamily="2" charset="-78"/>
                 <a:cs typeface="Amiri" pitchFamily="2" charset="-78"/>
               </a:rPr>
               <a:t>زَكَرِيَّا</a:t>
@@ -4810,11 +4840,12 @@
               <a:buNone/>
             </a:pPr>
             <a:r>
-              <a:rPr lang="en-US" sz="950" b="1" dirty="0">
+              <a:rPr lang="ar-SA" sz="950" b="1" dirty="0">
                 <a:solidFill>
                   <a:srgbClr val="FFFFFF"/>
                 </a:solidFill>
                 <a:latin typeface="Calibri" pitchFamily="34" charset="0"/>
+                <a:ea typeface="Amiri" pitchFamily="2" charset="-78"/>
                 <a:cs typeface="Amiri" pitchFamily="2" charset="-78"/>
               </a:rPr>
               <a:t>صِرْتُ أَسْتَيْقِظُ</a:t>
@@ -4875,11 +4906,12 @@
               <a:buNone/>
             </a:pPr>
             <a:r>
-              <a:rPr lang="en-US" sz="950" b="1" dirty="0">
+              <a:rPr lang="ar-SA" sz="950" b="1" dirty="0">
                 <a:solidFill>
                   <a:srgbClr val="FFFFFF"/>
                 </a:solidFill>
                 <a:latin typeface="Calibri" pitchFamily="34" charset="0"/>
+                <a:ea typeface="Amiri" pitchFamily="2" charset="-78"/>
                 <a:cs typeface="Amiri" pitchFamily="2" charset="-78"/>
               </a:rPr>
               <a:t>بَدَلًا مِنْ</a:t>
@@ -4940,11 +4972,12 @@
               <a:buNone/>
             </a:pPr>
             <a:r>
-              <a:rPr lang="en-US" sz="950" b="1" dirty="0">
+              <a:rPr lang="ar-SA" sz="950" b="1" dirty="0">
                 <a:solidFill>
                   <a:srgbClr val="FFFFFF"/>
                 </a:solidFill>
                 <a:latin typeface="Calibri" pitchFamily="34" charset="0"/>
+                <a:ea typeface="Amiri" pitchFamily="2" charset="-78"/>
                 <a:cs typeface="Amiri" pitchFamily="2" charset="-78"/>
               </a:rPr>
               <a:t>مِمَّا يُنْعِشُنِي</a:t>
@@ -5005,11 +5038,12 @@
               <a:buNone/>
             </a:pPr>
             <a:r>
-              <a:rPr lang="en-US" sz="950" b="1" dirty="0">
+              <a:rPr lang="ar-SA" sz="950" b="1" dirty="0">
                 <a:solidFill>
                   <a:srgbClr val="FFFFFF"/>
                 </a:solidFill>
                 <a:latin typeface="Calibri" pitchFamily="34" charset="0"/>
+                <a:ea typeface="Amiri" pitchFamily="2" charset="-78"/>
                 <a:cs typeface="Amiri" pitchFamily="2" charset="-78"/>
               </a:rPr>
               <a:t>إِذَا اسْتَمْرَرْتُ … فَسَأَدْخُلُ</a:t>
@@ -5143,6 +5177,7 @@
                   <a:srgbClr val="D4AF37"/>
                 </a:solidFill>
                 <a:latin typeface="Amiri" pitchFamily="2" charset="-78"/>
+                <a:ea typeface="Amiri" pitchFamily="2" charset="-78"/>
                 <a:cs typeface="Amiri" pitchFamily="2" charset="-78"/>
               </a:rPr>
               <a:t>م</a:t>
@@ -5463,6 +5498,7 @@
                   <a:srgbClr val="8A6D1E"/>
                 </a:solidFill>
                 <a:latin typeface="Amiri" pitchFamily="2" charset="-78"/>
+                <a:ea typeface="Amiri" pitchFamily="2" charset="-78"/>
                 <a:cs typeface="Amiri" pitchFamily="2" charset="-78"/>
               </a:rPr>
               <a:t>اخْتَرْ عُنْوَانًا وَاحِدًا</a:t>
@@ -5743,6 +5779,7 @@
                   <a:srgbClr val="1B3B6F"/>
                 </a:solidFill>
                 <a:latin typeface="Amiri" pitchFamily="2" charset="-78"/>
+                <a:ea typeface="Amiri" pitchFamily="2" charset="-78"/>
                 <a:cs typeface="Amiri" pitchFamily="2" charset="-78"/>
               </a:rPr>
               <a:t>حَيَاتِي الصِّحِّيَّةُ: الطَّعَامُ وَالرِّيَاضَةُ وَالنَّوْمُ</a:t>
@@ -5781,6 +5818,7 @@
                   <a:srgbClr val="1B3B6F"/>
                 </a:solidFill>
                 <a:latin typeface="Amiri" pitchFamily="2" charset="-78"/>
+                <a:ea typeface="Amiri" pitchFamily="2" charset="-78"/>
                 <a:cs typeface="Amiri" pitchFamily="2" charset="-78"/>
               </a:rPr>
               <a:t>(أ)</a:t>
@@ -5887,6 +5925,7 @@
                   <a:srgbClr val="1B3B6F"/>
                 </a:solidFill>
                 <a:latin typeface="Amiri" pitchFamily="2" charset="-78"/>
+                <a:ea typeface="Amiri" pitchFamily="2" charset="-78"/>
                 <a:cs typeface="Amiri" pitchFamily="2" charset="-78"/>
               </a:rPr>
               <a:t>رُوتِينُكَ اليَوْمِيُّ · طَعَامُكَ وَوَجَبَاتُكَ · الرِّيَاضَةُ وَمَرَّةً كُنْتَ فِيهَا مَرِيضًا · كَيْفَ تَغَيَّرْتَ وَخُطَطُكَ</a:t>
@@ -6018,6 +6057,7 @@
                   <a:srgbClr val="1B3B6F"/>
                 </a:solidFill>
                 <a:latin typeface="Amiri" pitchFamily="2" charset="-78"/>
+                <a:ea typeface="Amiri" pitchFamily="2" charset="-78"/>
                 <a:cs typeface="Amiri" pitchFamily="2" charset="-78"/>
               </a:rPr>
               <a:t>هَلْ أَصْبَحَ الشَّبَابُ أَقَلَّ صِحَّةً مِنَ الأَجْيَالِ السَّابِقَةِ؟</a:t>
@@ -6056,6 +6096,7 @@
                   <a:srgbClr val="1B3B6F"/>
                 </a:solidFill>
                 <a:latin typeface="Amiri" pitchFamily="2" charset="-78"/>
+                <a:ea typeface="Amiri" pitchFamily="2" charset="-78"/>
                 <a:cs typeface="Amiri" pitchFamily="2" charset="-78"/>
               </a:rPr>
               <a:t>(ب)</a:t>
@@ -6159,6 +6200,7 @@
                   <a:srgbClr val="1B3B6F"/>
                 </a:solidFill>
                 <a:latin typeface="Amiri" pitchFamily="2" charset="-78"/>
+                <a:ea typeface="Amiri" pitchFamily="2" charset="-78"/>
                 <a:cs typeface="Amiri" pitchFamily="2" charset="-78"/>
               </a:rPr>
               <a:t>المَوْضُوعُ · السَّلْبِيَّاتُ وَالإِيجَابِيَّاتُ · مِثَالٌ مِنْ مَدْرَسَتِكَ · رَأْيُكَ</a:t>
@@ -6358,6 +6400,7 @@
                   <a:srgbClr val="D4AF37"/>
                 </a:solidFill>
                 <a:latin typeface="Amiri" pitchFamily="2" charset="-78"/>
+                <a:ea typeface="Amiri" pitchFamily="2" charset="-78"/>
                 <a:cs typeface="Amiri" pitchFamily="2" charset="-78"/>
               </a:rPr>
               <a:t>م</a:t>
@@ -6678,6 +6721,7 @@
                   <a:srgbClr val="8A6D1E"/>
                 </a:solidFill>
                 <a:latin typeface="Amiri" pitchFamily="2" charset="-78"/>
+                <a:ea typeface="Amiri" pitchFamily="2" charset="-78"/>
                 <a:cs typeface="Amiri" pitchFamily="2" charset="-78"/>
               </a:rPr>
               <a:t>خُطَّةُ الكِتَابَةِ</a:t>
@@ -7302,6 +7346,7 @@
                   <a:srgbClr val="1B3B6F"/>
                 </a:solidFill>
                 <a:latin typeface="Amiri" pitchFamily="2" charset="-78"/>
+                <a:ea typeface="Amiri" pitchFamily="2" charset="-78"/>
                 <a:cs typeface="Amiri" pitchFamily="2" charset="-78"/>
               </a:rPr>
               <a:t>آكُلُ الفَوَاكِهَ دَائِمًا.</a:t>
@@ -7401,6 +7446,7 @@
                   <a:srgbClr val="1B3B6F"/>
                 </a:solidFill>
                 <a:latin typeface="Amiri" pitchFamily="2" charset="-78"/>
+                <a:ea typeface="Amiri" pitchFamily="2" charset="-78"/>
                 <a:cs typeface="Amiri" pitchFamily="2" charset="-78"/>
               </a:rPr>
               <a:t>كَانَ يُؤْلِمُنِي حَلْقِي، فَذَهَبْتُ إِلَى الصَّيْدَلِيَّةِ.</a:t>
@@ -7500,6 +7546,7 @@
                   <a:srgbClr val="1B3B6F"/>
                 </a:solidFill>
                 <a:latin typeface="Amiri" pitchFamily="2" charset="-78"/>
+                <a:ea typeface="Amiri" pitchFamily="2" charset="-78"/>
                 <a:cs typeface="Amiri" pitchFamily="2" charset="-78"/>
               </a:rPr>
               <a:t>سَأَنَامُ مُبَكِّرًا أَكْثَرَ.</a:t>
@@ -7661,6 +7708,7 @@
                   <a:srgbClr val="1F2A37"/>
                 </a:solidFill>
                 <a:latin typeface="Amiri" pitchFamily="2" charset="-78"/>
+                <a:ea typeface="Amiri" pitchFamily="2" charset="-78"/>
                 <a:cs typeface="Amiri" pitchFamily="2" charset="-78"/>
               </a:rPr>
               <a:t>أ</a:t>
@@ -7687,6 +7735,7 @@
                   <a:srgbClr val="1F2A37"/>
                 </a:solidFill>
                 <a:latin typeface="Amiri" pitchFamily="2" charset="-78"/>
+                <a:ea typeface="Amiri" pitchFamily="2" charset="-78"/>
                 <a:cs typeface="Amiri" pitchFamily="2" charset="-78"/>
               </a:rPr>
               <a:t>ب</a:t>
@@ -7833,6 +7882,7 @@
                   <a:srgbClr val="D4AF37"/>
                 </a:solidFill>
                 <a:latin typeface="Amiri" pitchFamily="2" charset="-78"/>
+                <a:ea typeface="Amiri" pitchFamily="2" charset="-78"/>
                 <a:cs typeface="Amiri" pitchFamily="2" charset="-78"/>
               </a:rPr>
               <a:t>م</a:t>
@@ -8090,6 +8140,7 @@
                   <a:srgbClr val="8A6D1E"/>
                 </a:solidFill>
                 <a:latin typeface="Amiri" pitchFamily="2" charset="-78"/>
+                <a:ea typeface="Amiri" pitchFamily="2" charset="-78"/>
                 <a:cs typeface="Amiri" pitchFamily="2" charset="-78"/>
               </a:rPr>
               <a:t>أ</a:t>
@@ -8154,6 +8205,7 @@
                   <a:srgbClr val="1B3B6F"/>
                 </a:solidFill>
                 <a:latin typeface="Amiri" pitchFamily="2" charset="-78"/>
+                <a:ea typeface="Amiri" pitchFamily="2" charset="-78"/>
                 <a:cs typeface="Amiri" pitchFamily="2" charset="-78"/>
               </a:rPr>
               <a:t>أ</a:t>
@@ -8205,6 +8257,7 @@
                   <a:srgbClr val="8A6D1E"/>
                 </a:solidFill>
                 <a:latin typeface="Amiri" pitchFamily="2" charset="-78"/>
+                <a:ea typeface="Amiri" pitchFamily="2" charset="-78"/>
                 <a:cs typeface="Amiri" pitchFamily="2" charset="-78"/>
               </a:rPr>
               <a:t>نَمُوذَجُ الإِجَابَةِ</a:t>
@@ -8318,6 +8371,7 @@
                   <a:srgbClr val="1F2A37"/>
                 </a:solidFill>
                 <a:latin typeface="Amiri" pitchFamily="2" charset="-78"/>
+                <a:ea typeface="Amiri" pitchFamily="2" charset="-78"/>
                 <a:cs typeface="Amiri" pitchFamily="2" charset="-78"/>
               </a:rPr>
               <a:t>اسْمِي زَكَرِيَّا، وَأَنَا فِي الصَّفِّ الحَادِي عَشَرَ. أُحِبُّ أَنْ أَعِيشَ حَيَاةً صِحِّيَّةً، لِأَنَّ الصِّحَّةَ مُهِمَّةٌ جِدًّا لِلدِّرَاسَةِ.</a:t>
@@ -8337,6 +8391,7 @@
                   <a:srgbClr val="1F2A37"/>
                 </a:solidFill>
                 <a:latin typeface="Amiri" pitchFamily="2" charset="-78"/>
+                <a:ea typeface="Amiri" pitchFamily="2" charset="-78"/>
                 <a:cs typeface="Amiri" pitchFamily="2" charset="-78"/>
               </a:rPr>
               <a:t>فِي الصَّبَاحِ أَسْتَيْقِظُ فِي السَّادِسَةِ وَالنِّصْفِ، وَأُفْطِرُ البَيْضَ وَالخُبْزَ وَالحَلِيبَ مَعَ أُسْرَتِي. فِي المَدْرَسَةِ آكُلُ الفَوَاكِهَ دَائِمًا، وَأَشْرَبُ المَاءَ كَثِيرًا، لِأَنَّهُ مُفِيدٌ لِلْجِسْمِ وَالعَقْلِ. فِي المَسَاءِ تَطْبُخُ أُمِّي العَشَاءَ، وَنَأْكُلُ مَعًا فِي السَّابِعَةِ. أُفَضِّلُ الدَّجَاجَ وَالأَرُزَّ، لٰكِنِّي لَا أُحِبُّ السَّمَكَ أَبَدًا.</a:t>
@@ -8356,6 +8411,7 @@
                   <a:srgbClr val="1F2A37"/>
                 </a:solidFill>
                 <a:latin typeface="Amiri" pitchFamily="2" charset="-78"/>
+                <a:ea typeface="Amiri" pitchFamily="2" charset="-78"/>
                 <a:cs typeface="Amiri" pitchFamily="2" charset="-78"/>
               </a:rPr>
               <a:t>أَلْعَبُ كُرَةَ السَّلَّةِ مَرَّتَيْنِ فِي الأُسْبُوعِ، وَأَمْشِي إِلَى المَدْرَسَةِ كُلَّ يَوْمٍ، وَتَسْتَغْرِقُ الرِّحْلَةُ رُبْعَ سَاعَةٍ. فِي الشَّهْرِ المَاضِي كُنْتُ مَرِيضًا؛ كَانَ يُؤْلِمُنِي حَلْقِي، فَذَهَبْتُ إِلَى الصَّيْدَلِيَّةِ، وَأَخَذْتُ دَوَاءً، وَبَقِيتُ فِي البَيْتِ يَوْمَيْنِ، ثُمَّ رَجَعْتُ إِلَى المَدْرَسَةِ.</a:t>
@@ -8375,6 +8431,7 @@
                   <a:srgbClr val="1F2A37"/>
                 </a:solidFill>
                 <a:latin typeface="Amiri" pitchFamily="2" charset="-78"/>
+                <a:ea typeface="Amiri" pitchFamily="2" charset="-78"/>
                 <a:cs typeface="Amiri" pitchFamily="2" charset="-78"/>
               </a:rPr>
               <a:t>فِي الصَّغَرِ كُنْتُ آكُلُ الحَلَوِيَّاتِ كَثِيرًا، أَمَّا الآنَ فَآكُلُهَا قَلِيلًا. فِي المُسْتَقْبَلِ سَأَنَامُ مُبَكِّرًا أَكْثَرَ، لِأَنَّ النَّوْمَ يُسَاعِدُنِي عَلَى التَّرْكِيزِ.</a:t>
@@ -8538,11 +8595,12 @@
               <a:buNone/>
             </a:pPr>
             <a:r>
-              <a:rPr lang="en-US" sz="950" b="1" dirty="0">
+              <a:rPr lang="ar-SA" sz="950" b="1" dirty="0">
                 <a:solidFill>
                   <a:srgbClr val="FFFFFF"/>
                 </a:solidFill>
                 <a:latin typeface="Calibri" pitchFamily="34" charset="0"/>
+                <a:ea typeface="Amiri" pitchFamily="2" charset="-78"/>
                 <a:cs typeface="Amiri" pitchFamily="2" charset="-78"/>
               </a:rPr>
               <a:t>فِي السَّادِسَةِ وَالنِّصْفِ</a:t>
@@ -8603,11 +8661,12 @@
               <a:buNone/>
             </a:pPr>
             <a:r>
-              <a:rPr lang="en-US" sz="950" b="1" dirty="0">
+              <a:rPr lang="ar-SA" sz="950" b="1" dirty="0">
                 <a:solidFill>
                   <a:srgbClr val="FFFFFF"/>
                 </a:solidFill>
                 <a:latin typeface="Calibri" pitchFamily="34" charset="0"/>
+                <a:ea typeface="Amiri" pitchFamily="2" charset="-78"/>
                 <a:cs typeface="Amiri" pitchFamily="2" charset="-78"/>
               </a:rPr>
               <a:t>مَرَّتَيْنِ فِي الأُسْبُوعِ</a:t>
@@ -8668,11 +8727,12 @@
               <a:buNone/>
             </a:pPr>
             <a:r>
-              <a:rPr lang="en-US" sz="950" b="1" dirty="0">
+              <a:rPr lang="ar-SA" sz="950" b="1" dirty="0">
                 <a:solidFill>
                   <a:srgbClr val="FFFFFF"/>
                 </a:solidFill>
                 <a:latin typeface="Calibri" pitchFamily="34" charset="0"/>
+                <a:ea typeface="Amiri" pitchFamily="2" charset="-78"/>
                 <a:cs typeface="Amiri" pitchFamily="2" charset="-78"/>
               </a:rPr>
               <a:t>كَانَ يُؤْلِمُنِي</a:t>
@@ -8733,11 +8793,12 @@
               <a:buNone/>
             </a:pPr>
             <a:r>
-              <a:rPr lang="en-US" sz="950" b="1" dirty="0">
+              <a:rPr lang="ar-SA" sz="950" b="1" dirty="0">
                 <a:solidFill>
                   <a:srgbClr val="FFFFFF"/>
                 </a:solidFill>
                 <a:latin typeface="Calibri" pitchFamily="34" charset="0"/>
+                <a:ea typeface="Amiri" pitchFamily="2" charset="-78"/>
                 <a:cs typeface="Amiri" pitchFamily="2" charset="-78"/>
               </a:rPr>
               <a:t>كُنْتُ آكُلُ … أَمَّا الآنَ</a:t>
@@ -8871,6 +8932,7 @@
                   <a:srgbClr val="D4AF37"/>
                 </a:solidFill>
                 <a:latin typeface="Amiri" pitchFamily="2" charset="-78"/>
+                <a:ea typeface="Amiri" pitchFamily="2" charset="-78"/>
                 <a:cs typeface="Amiri" pitchFamily="2" charset="-78"/>
               </a:rPr>
               <a:t>م</a:t>
@@ -9128,6 +9190,7 @@
                   <a:srgbClr val="8A6D1E"/>
                 </a:solidFill>
                 <a:latin typeface="Amiri" pitchFamily="2" charset="-78"/>
+                <a:ea typeface="Amiri" pitchFamily="2" charset="-78"/>
                 <a:cs typeface="Amiri" pitchFamily="2" charset="-78"/>
               </a:rPr>
               <a:t>أ</a:t>
@@ -9192,6 +9255,7 @@
                   <a:srgbClr val="1B3B6F"/>
                 </a:solidFill>
                 <a:latin typeface="Amiri" pitchFamily="2" charset="-78"/>
+                <a:ea typeface="Amiri" pitchFamily="2" charset="-78"/>
                 <a:cs typeface="Amiri" pitchFamily="2" charset="-78"/>
               </a:rPr>
               <a:t>أ</a:t>
@@ -9243,6 +9307,7 @@
                   <a:srgbClr val="8A6D1E"/>
                 </a:solidFill>
                 <a:latin typeface="Amiri" pitchFamily="2" charset="-78"/>
+                <a:ea typeface="Amiri" pitchFamily="2" charset="-78"/>
                 <a:cs typeface="Amiri" pitchFamily="2" charset="-78"/>
               </a:rPr>
               <a:t>نَمُوذَجُ الإِجَابَةِ</a:t>
@@ -9356,6 +9421,7 @@
                   <a:srgbClr val="1F2A37"/>
                 </a:solidFill>
                 <a:latin typeface="Amiri" pitchFamily="2" charset="-78"/>
+                <a:ea typeface="Amiri" pitchFamily="2" charset="-78"/>
                 <a:cs typeface="Amiri" pitchFamily="2" charset="-78"/>
               </a:rPr>
               <a:t>لَمْ أَكُنْ أُفَكِّرُ فِي صِحَّتِي كَثِيرًا حَتَّى جَاءَ يَوْمٌ نِمْتُ فِيهِ فِي حِصَّةِ الرِّيَاضِيَّاتِ! يَوْمَهَا سَأَلَنِي المُعَلِّمُ بِلُطْفٍ وَهُوَ يَبْتَسِمُ: "مَتَى نِمْتَ أَمْسِ؟"، فَخَجِلْتُ مِنَ الجَوَابِ: فِي الثَّانِيَةِ بَعْدَ مُنْتَصَفِ اللَّيْلِ، بَعْدَ سَاعَاتٍ مِنَ الفِيدْيُوهَاتِ.</a:t>
@@ -9375,6 +9441,7 @@
                   <a:srgbClr val="1F2A37"/>
                 </a:solidFill>
                 <a:latin typeface="Amiri" pitchFamily="2" charset="-78"/>
+                <a:ea typeface="Amiri" pitchFamily="2" charset="-78"/>
                 <a:cs typeface="Amiri" pitchFamily="2" charset="-78"/>
               </a:rPr>
               <a:t>كُنْتُ آنَذَاكَ أَسْهَرُ عَلَى الهَاتِفِ، وَأُهْمِلُ الفُطُورَ، وَأَشْتَرِي الطَّعَامَ السَّرِيعَ فِي طَرِيقِ العَوْدَةِ. أَمَّا اليَوْمَ، فَأَنَامُ فِي العَاشِرَةِ، وَأَسْتَيْقِظُ نَشِيطًا، وَأَمْشِي إِلَى المَدْرَسَةِ رُبْعَ سَاعَةٍ بَدَلًا مِنْ أَنْ يُوصِلَنِي أَبِي بِالسَّيَّارَةِ، وَآكُلُ الفَوَاكِهَ فِي الاسْتِرَاحَةِ.</a:t>
@@ -9394,6 +9461,7 @@
                   <a:srgbClr val="1F2A37"/>
                 </a:solidFill>
                 <a:latin typeface="Amiri" pitchFamily="2" charset="-78"/>
+                <a:ea typeface="Amiri" pitchFamily="2" charset="-78"/>
                 <a:cs typeface="Amiri" pitchFamily="2" charset="-78"/>
               </a:rPr>
               <a:t>وَلَمْ يَكُنِ التَّغْيِيرُ سَهْلًا؛ فَفِي الأُسْبُوعِ الأَوَّلِ كُنْتُ أَشْعُرُ بِالمَلَلِ دُونَ الهَاتِفِ، وَأَشْتَاقُ إِلَى البَطَاطَا المَقْلِيَّةِ وَالمَشْرُوبَاتِ الغَازِيَّةِ. غَيْرَ أَنَّ النَّتِيجَةَ ظَهَرَتْ بِسُرْعَةٍ: تَحَسَّنَ تَرْكِيزِي، وَارْتَفَعَتْ دَرَجَاتِي، وَقَلَّتْ نَزَلَاتُ البَرْدِ الَّتِي كَانَتْ تُصِيبُنِي كُلَّ شَهْرٍ.</a:t>
@@ -9413,6 +9481,7 @@
                   <a:srgbClr val="1F2A37"/>
                 </a:solidFill>
                 <a:latin typeface="Amiri" pitchFamily="2" charset="-78"/>
+                <a:ea typeface="Amiri" pitchFamily="2" charset="-78"/>
                 <a:cs typeface="Amiri" pitchFamily="2" charset="-78"/>
               </a:rPr>
               <a:t>لِذٰلِكَ أَرَى أَنَّ الصِّحَّةَ لَيْسَتْ رِيَاضَةً قَاسِيَةً أَوْ حِمْيَةً صَعْبَةً، بَلْ عَادَاتٌ صَغِيرَةٌ نُكَرِّرُهَا كُلَّ يَوْمٍ حَتَّى تُصْبِحَ جُزْءًا مِنَّا. وَلَوْ رَجَعَ بِيَ الزَّمَنُ، لَبَدَأْتُ هٰذِهِ العَادَاتِ قَبْلَ سَنَوَاتٍ.</a:t>
@@ -9511,11 +9580,12 @@
               <a:buNone/>
             </a:pPr>
             <a:r>
-              <a:rPr lang="en-US" sz="950" b="1" dirty="0">
+              <a:rPr lang="ar-SA" sz="950" b="1" dirty="0">
                 <a:solidFill>
                   <a:srgbClr val="FFFFFF"/>
                 </a:solidFill>
                 <a:latin typeface="Calibri" pitchFamily="34" charset="0"/>
+                <a:ea typeface="Amiri" pitchFamily="2" charset="-78"/>
                 <a:cs typeface="Amiri" pitchFamily="2" charset="-78"/>
               </a:rPr>
               <a:t>لَمْ أَكُنْ … حَتَّى</a:t>
@@ -9576,11 +9646,12 @@
               <a:buNone/>
             </a:pPr>
             <a:r>
-              <a:rPr lang="en-US" sz="950" b="1" dirty="0">
+              <a:rPr lang="ar-SA" sz="950" b="1" dirty="0">
                 <a:solidFill>
                   <a:srgbClr val="FFFFFF"/>
                 </a:solidFill>
                 <a:latin typeface="Calibri" pitchFamily="34" charset="0"/>
+                <a:ea typeface="Amiri" pitchFamily="2" charset="-78"/>
                 <a:cs typeface="Amiri" pitchFamily="2" charset="-78"/>
               </a:rPr>
               <a:t>كُنْتُ آنَذَاكَ … أَمَّا اليَوْمَ</a:t>
@@ -9641,11 +9712,12 @@
               <a:buNone/>
             </a:pPr>
             <a:r>
-              <a:rPr lang="en-US" sz="950" b="1" dirty="0">
+              <a:rPr lang="ar-SA" sz="950" b="1" dirty="0">
                 <a:solidFill>
                   <a:srgbClr val="FFFFFF"/>
                 </a:solidFill>
                 <a:latin typeface="Calibri" pitchFamily="34" charset="0"/>
+                <a:ea typeface="Amiri" pitchFamily="2" charset="-78"/>
                 <a:cs typeface="Amiri" pitchFamily="2" charset="-78"/>
               </a:rPr>
               <a:t>بَدَلًا مِنْ أَنْ</a:t>
@@ -9706,11 +9778,12 @@
               <a:buNone/>
             </a:pPr>
             <a:r>
-              <a:rPr lang="en-US" sz="950" b="1" dirty="0">
+              <a:rPr lang="ar-SA" sz="950" b="1" dirty="0">
                 <a:solidFill>
                   <a:srgbClr val="FFFFFF"/>
                 </a:solidFill>
                 <a:latin typeface="Calibri" pitchFamily="34" charset="0"/>
+                <a:ea typeface="Amiri" pitchFamily="2" charset="-78"/>
                 <a:cs typeface="Amiri" pitchFamily="2" charset="-78"/>
               </a:rPr>
               <a:t>لَوْ رَجَعَ بِيَ الزَّمَنُ، لَبَدَأْتُ</a:t>
@@ -9844,6 +9917,7 @@
                   <a:srgbClr val="D4AF37"/>
                 </a:solidFill>
                 <a:latin typeface="Amiri" pitchFamily="2" charset="-78"/>
+                <a:ea typeface="Amiri" pitchFamily="2" charset="-78"/>
                 <a:cs typeface="Amiri" pitchFamily="2" charset="-78"/>
               </a:rPr>
               <a:t>م</a:t>
@@ -10101,6 +10175,7 @@
                   <a:srgbClr val="8A6D1E"/>
                 </a:solidFill>
                 <a:latin typeface="Amiri" pitchFamily="2" charset="-78"/>
+                <a:ea typeface="Amiri" pitchFamily="2" charset="-78"/>
                 <a:cs typeface="Amiri" pitchFamily="2" charset="-78"/>
               </a:rPr>
               <a:t>ب</a:t>
@@ -10165,6 +10240,7 @@
                   <a:srgbClr val="1B3B6F"/>
                 </a:solidFill>
                 <a:latin typeface="Amiri" pitchFamily="2" charset="-78"/>
+                <a:ea typeface="Amiri" pitchFamily="2" charset="-78"/>
                 <a:cs typeface="Amiri" pitchFamily="2" charset="-78"/>
               </a:rPr>
               <a:t>ب</a:t>
@@ -10216,6 +10292,7 @@
                   <a:srgbClr val="8A6D1E"/>
                 </a:solidFill>
                 <a:latin typeface="Amiri" pitchFamily="2" charset="-78"/>
+                <a:ea typeface="Amiri" pitchFamily="2" charset="-78"/>
                 <a:cs typeface="Amiri" pitchFamily="2" charset="-78"/>
               </a:rPr>
               <a:t>نَمُوذَجُ الإِجَابَةِ</a:t>
@@ -10329,6 +10406,7 @@
                   <a:srgbClr val="1F2A37"/>
                 </a:solidFill>
                 <a:latin typeface="Amiri" pitchFamily="2" charset="-78"/>
+                <a:ea typeface="Amiri" pitchFamily="2" charset="-78"/>
                 <a:cs typeface="Amiri" pitchFamily="2" charset="-78"/>
               </a:rPr>
               <a:t>يَحْمِلُ أَغْلَبُ المُرَاهِقِينَ اليَوْمَ هَاتِفًا يَعْرِفُ عَدَدَ خُطُوَاتِهِمْ وَسَاعَاتِ نَوْمِهِمْ، وَمَعَ ذٰلِكَ يَقُولُ الأَطِبَّاءُ إِنَّهُمْ أَقَلُّ حَرَكَةً وَأَكْثَرُ تَعَبًا مِنْ آبَائِهِمْ. فَهَلْ أَصْبَحَ الشَّبَابُ حَقًّا أَقَلَّ صِحَّةً مِنَ الأَجْيَالِ السَّابِقَةِ؟</a:t>
@@ -10348,6 +10426,7 @@
                   <a:srgbClr val="1F2A37"/>
                 </a:solidFill>
                 <a:latin typeface="Amiri" pitchFamily="2" charset="-78"/>
+                <a:ea typeface="Amiri" pitchFamily="2" charset="-78"/>
                 <a:cs typeface="Amiri" pitchFamily="2" charset="-78"/>
               </a:rPr>
               <a:t>مِنْ نَاحِيَةٍ، يَقْضِي كَثِيرٌ مِنَّا كُلَّ يَوْمٍ سَاعَاتٍ طَوِيلَةً أَمَامَ الشَّاشَاتِ، وَيَأْكُلُونَ الطَّعَامَ السَّرِيعَ لِأَنَّهُ رَخِيصٌ وَسَهْلٌ، مِمَّا يُؤَدِّي إِلَى السُّمْنَةِ وَقِلَّةِ النَّوْمِ وَضَعْفِ التَّرْكِيزِ. وَمِنْ نَاحِيَةٍ أُخْرَى، يَعْرِفُ جِيلُنَا عَنِ التَّغْذِيَةِ وَالصِّحَّةِ النَّفْسِيَّةِ أَكْثَرَ مِنْ أَيِّ جِيلٍ سَابِقٍ، وَيَهْتَمُّ كَثِيرُونَ بِالرِّيَاضَةِ وَالأَكْلِ النَّبَاتِيِّ وَالتَّأَمُّلِ.</a:t>
@@ -10367,6 +10446,7 @@
                   <a:srgbClr val="1F2A37"/>
                 </a:solidFill>
                 <a:latin typeface="Amiri" pitchFamily="2" charset="-78"/>
+                <a:ea typeface="Amiri" pitchFamily="2" charset="-78"/>
                 <a:cs typeface="Amiri" pitchFamily="2" charset="-78"/>
               </a:rPr>
               <a:t>وَقَدْ رَأَيْتُ الوَجْهَيْنِ فِي صَفِّي؛ فَبَعْضُ زُمَلَائِي لَا يَتَحَرَّكُونَ إِلَّا بَيْنَ السَّرِيرِ وَالحَاسُوبِ، بَيْنَمَا أَسَّسَ آخَرُونَ نَادِيًا لِلْجَرْيِ يَلْتَقِي كُلَّ صَبَاحٍ قَبْلَ الدُّرُوسِ، وَيَضُمُّ اليَوْمَ ثَلَاثِينَ طَالِبًا.</a:t>
@@ -10386,6 +10466,7 @@
                   <a:srgbClr val="1F2A37"/>
                 </a:solidFill>
                 <a:latin typeface="Amiri" pitchFamily="2" charset="-78"/>
+                <a:ea typeface="Amiri" pitchFamily="2" charset="-78"/>
                 <a:cs typeface="Amiri" pitchFamily="2" charset="-78"/>
               </a:rPr>
               <a:t>لِذٰلِكَ لَا أَظُنُّ أَنَّ المُشْكِلَةَ فِي الجِيلِ نَفْسِهِ، بَلْ فِي البِيئَةِ الَّتِي يَعِيشُ فِيهَا وَالعَادَاتِ الَّتِي يَتَعَلَّمُهَا. فَإِذَا وَفَّرَتِ المَدَارِسُ وَجَبَاتٍ صِحِّيَّةً وَوَقْتًا لِلرِّيَاضَةِ، فَسَيَخْتَارُ الشَّبَابُ الطَّرِيقَ الأَصَحَّ دُونَ أَنْ يُجْبِرَهُمْ أَحَدٌ.</a:t>
@@ -10484,11 +10565,12 @@
               <a:buNone/>
             </a:pPr>
             <a:r>
-              <a:rPr lang="en-US" sz="950" b="1" dirty="0">
+              <a:rPr lang="ar-SA" sz="950" b="1" dirty="0">
                 <a:solidFill>
                   <a:srgbClr val="FFFFFF"/>
                 </a:solidFill>
                 <a:latin typeface="Calibri" pitchFamily="34" charset="0"/>
+                <a:ea typeface="Amiri" pitchFamily="2" charset="-78"/>
                 <a:cs typeface="Amiri" pitchFamily="2" charset="-78"/>
               </a:rPr>
               <a:t>وَمَعَ ذٰلِكَ يَقُولُ</a:t>
@@ -10549,11 +10631,12 @@
               <a:buNone/>
             </a:pPr>
             <a:r>
-              <a:rPr lang="en-US" sz="950" b="1" dirty="0">
+              <a:rPr lang="ar-SA" sz="950" b="1" dirty="0">
                 <a:solidFill>
                   <a:srgbClr val="FFFFFF"/>
                 </a:solidFill>
                 <a:latin typeface="Calibri" pitchFamily="34" charset="0"/>
+                <a:ea typeface="Amiri" pitchFamily="2" charset="-78"/>
                 <a:cs typeface="Amiri" pitchFamily="2" charset="-78"/>
               </a:rPr>
               <a:t>مِمَّا يُؤَدِّي إِلَى</a:t>
@@ -10614,11 +10697,12 @@
               <a:buNone/>
             </a:pPr>
             <a:r>
-              <a:rPr lang="en-US" sz="950" b="1" dirty="0">
+              <a:rPr lang="ar-SA" sz="950" b="1" dirty="0">
                 <a:solidFill>
                   <a:srgbClr val="FFFFFF"/>
                 </a:solidFill>
                 <a:latin typeface="Calibri" pitchFamily="34" charset="0"/>
+                <a:ea typeface="Amiri" pitchFamily="2" charset="-78"/>
                 <a:cs typeface="Amiri" pitchFamily="2" charset="-78"/>
               </a:rPr>
               <a:t>لَا … إِلَّا … بَيْنَمَا</a:t>
@@ -10679,11 +10763,12 @@
               <a:buNone/>
             </a:pPr>
             <a:r>
-              <a:rPr lang="en-US" sz="950" b="1" dirty="0">
+              <a:rPr lang="ar-SA" sz="950" b="1" dirty="0">
                 <a:solidFill>
                   <a:srgbClr val="FFFFFF"/>
                 </a:solidFill>
                 <a:latin typeface="Calibri" pitchFamily="34" charset="0"/>
+                <a:ea typeface="Amiri" pitchFamily="2" charset="-78"/>
                 <a:cs typeface="Amiri" pitchFamily="2" charset="-78"/>
               </a:rPr>
               <a:t>إِذَا وَفَّرَتْ … فَسَيَخْتَارُ</a:t>
@@ -10817,6 +10902,7 @@
                   <a:srgbClr val="D4AF37"/>
                 </a:solidFill>
                 <a:latin typeface="Amiri" pitchFamily="2" charset="-78"/>
+                <a:ea typeface="Amiri" pitchFamily="2" charset="-78"/>
                 <a:cs typeface="Amiri" pitchFamily="2" charset="-78"/>
               </a:rPr>
               <a:t>م</a:t>
@@ -11137,6 +11223,7 @@
                   <a:srgbClr val="8A6D1E"/>
                 </a:solidFill>
                 <a:latin typeface="Amiri" pitchFamily="2" charset="-78"/>
+                <a:ea typeface="Amiri" pitchFamily="2" charset="-78"/>
                 <a:cs typeface="Amiri" pitchFamily="2" charset="-78"/>
               </a:rPr>
               <a:t>قَيِّمْ عَمَلَكَ</a:t>
@@ -12381,6 +12468,7 @@
                   <a:srgbClr val="FFFFFF"/>
                 </a:solidFill>
                 <a:latin typeface="Amiri" pitchFamily="2" charset="-78"/>
+                <a:ea typeface="Amiri" pitchFamily="2" charset="-78"/>
                 <a:cs typeface="Amiri" pitchFamily="2" charset="-78"/>
               </a:rPr>
               <a:t>أَحْسَنْتُمْ! إِلَى اللِّقَاءِ</a:t>
@@ -12533,6 +12621,7 @@
                   <a:srgbClr val="D4AF37"/>
                 </a:solidFill>
                 <a:latin typeface="Amiri" pitchFamily="2" charset="-78"/>
+                <a:ea typeface="Amiri" pitchFamily="2" charset="-78"/>
                 <a:cs typeface="Amiri" pitchFamily="2" charset="-78"/>
               </a:rPr>
               <a:t>وَرْشَةُ التَّدْرِيبِ</a:t>
@@ -12666,6 +12755,7 @@
                   <a:srgbClr val="D4AF37"/>
                 </a:solidFill>
                 <a:latin typeface="Amiri" pitchFamily="2" charset="-78"/>
+                <a:ea typeface="Amiri" pitchFamily="2" charset="-78"/>
                 <a:cs typeface="Amiri" pitchFamily="2" charset="-78"/>
               </a:rPr>
               <a:t>م</a:t>
@@ -12986,6 +13076,7 @@
                   <a:srgbClr val="8A6D1E"/>
                 </a:solidFill>
                 <a:latin typeface="Amiri" pitchFamily="2" charset="-78"/>
+                <a:ea typeface="Amiri" pitchFamily="2" charset="-78"/>
                 <a:cs typeface="Amiri" pitchFamily="2" charset="-78"/>
               </a:rPr>
               <a:t>آدَابُ الصَّفِّ</a:t>
@@ -14517,6 +14608,7 @@
                   <a:srgbClr val="D4AF37"/>
                 </a:solidFill>
                 <a:latin typeface="Amiri" pitchFamily="2" charset="-78"/>
+                <a:ea typeface="Amiri" pitchFamily="2" charset="-78"/>
                 <a:cs typeface="Amiri" pitchFamily="2" charset="-78"/>
               </a:rPr>
               <a:t>م</a:t>
@@ -14837,6 +14929,7 @@
                   <a:srgbClr val="8A6D1E"/>
                 </a:solidFill>
                 <a:latin typeface="Amiri" pitchFamily="2" charset="-78"/>
+                <a:ea typeface="Amiri" pitchFamily="2" charset="-78"/>
                 <a:cs typeface="Amiri" pitchFamily="2" charset="-78"/>
               </a:rPr>
               <a:t>خَرِيطَةُ الوَرْشَةِ</a:t>
@@ -15151,6 +15244,7 @@
                   <a:srgbClr val="1B3B6F"/>
                 </a:solidFill>
                 <a:latin typeface="Amiri" pitchFamily="2" charset="-78"/>
+                <a:ea typeface="Amiri" pitchFamily="2" charset="-78"/>
                 <a:cs typeface="Amiri" pitchFamily="2" charset="-78"/>
               </a:rPr>
               <a:t>كَيْفَ</a:t>
@@ -15427,6 +15521,7 @@
                   <a:srgbClr val="1E6B52"/>
                 </a:solidFill>
                 <a:latin typeface="Amiri" pitchFamily="2" charset="-78"/>
+                <a:ea typeface="Amiri" pitchFamily="2" charset="-78"/>
                 <a:cs typeface="Amiri" pitchFamily="2" charset="-78"/>
               </a:rPr>
               <a:t>الاسْتِمَارَةُ</a:t>
@@ -15703,6 +15798,7 @@
                   <a:srgbClr val="1E6B52"/>
                 </a:solidFill>
                 <a:latin typeface="Amiri" pitchFamily="2" charset="-78"/>
+                <a:ea typeface="Amiri" pitchFamily="2" charset="-78"/>
                 <a:cs typeface="Amiri" pitchFamily="2" charset="-78"/>
               </a:rPr>
               <a:t>الرِّسَالَةُ</a:t>
@@ -15979,6 +16075,7 @@
                   <a:srgbClr val="1E6B52"/>
                 </a:solidFill>
                 <a:latin typeface="Amiri" pitchFamily="2" charset="-78"/>
+                <a:ea typeface="Amiri" pitchFamily="2" charset="-78"/>
                 <a:cs typeface="Amiri" pitchFamily="2" charset="-78"/>
               </a:rPr>
               <a:t>المَقَالُ</a:t>
@@ -16255,6 +16352,7 @@
                   <a:srgbClr val="8A6D1E"/>
                 </a:solidFill>
                 <a:latin typeface="Amiri" pitchFamily="2" charset="-78"/>
+                <a:ea typeface="Amiri" pitchFamily="2" charset="-78"/>
                 <a:cs typeface="Amiri" pitchFamily="2" charset="-78"/>
               </a:rPr>
               <a:t>قَيِّمْ</a:t>
@@ -16498,6 +16596,7 @@
                   <a:srgbClr val="D4AF37"/>
                 </a:solidFill>
                 <a:latin typeface="Amiri" pitchFamily="2" charset="-78"/>
+                <a:ea typeface="Amiri" pitchFamily="2" charset="-78"/>
                 <a:cs typeface="Amiri" pitchFamily="2" charset="-78"/>
               </a:rPr>
               <a:t>م</a:t>
@@ -16818,6 +16917,7 @@
                   <a:srgbClr val="8A6D1E"/>
                 </a:solidFill>
                 <a:latin typeface="Amiri" pitchFamily="2" charset="-78"/>
+                <a:ea typeface="Amiri" pitchFamily="2" charset="-78"/>
                 <a:cs typeface="Amiri" pitchFamily="2" charset="-78"/>
               </a:rPr>
               <a:t>امْتِحَانُ الكِتَابَةِ</a:t>
@@ -17442,6 +17542,7 @@
                   <a:srgbClr val="1B3B6F"/>
                 </a:solidFill>
                 <a:latin typeface="Amiri" pitchFamily="2" charset="-78"/>
+                <a:ea typeface="Amiri" pitchFamily="2" charset="-78"/>
                 <a:cs typeface="Amiri" pitchFamily="2" charset="-78"/>
               </a:rPr>
               <a:t>آكُلُ الفَوَاكِهَ دَائِمًا، وَلَا أَشْرَبُ المَشْرُوبَاتِ الغَازِيَّةَ أَبَدًا</a:t>
@@ -17541,6 +17642,7 @@
                   <a:srgbClr val="1B3B6F"/>
                 </a:solidFill>
                 <a:latin typeface="Amiri" pitchFamily="2" charset="-78"/>
+                <a:ea typeface="Amiri" pitchFamily="2" charset="-78"/>
                 <a:cs typeface="Amiri" pitchFamily="2" charset="-78"/>
               </a:rPr>
               <a:t>كُنْتُ أَنَامُ مُتَأَخِّرًا، أَمَّا الآنَ فَأَنَامُ فِي العَاشِرَةِ</a:t>
@@ -17640,6 +17742,7 @@
                   <a:srgbClr val="1B3B6F"/>
                 </a:solidFill>
                 <a:latin typeface="Amiri" pitchFamily="2" charset="-78"/>
+                <a:ea typeface="Amiri" pitchFamily="2" charset="-78"/>
                 <a:cs typeface="Amiri" pitchFamily="2" charset="-78"/>
               </a:rPr>
               <a:t>يُؤْلِمُنِي حَلْقِي مُنْذُ يَوْمَيْنِ</a:t>
@@ -17811,6 +17914,7 @@
                   <a:srgbClr val="D4AF37"/>
                 </a:solidFill>
                 <a:latin typeface="Amiri" pitchFamily="2" charset="-78"/>
+                <a:ea typeface="Amiri" pitchFamily="2" charset="-78"/>
                 <a:cs typeface="Amiri" pitchFamily="2" charset="-78"/>
               </a:rPr>
               <a:t>م</a:t>
@@ -18131,6 +18235,7 @@
                   <a:srgbClr val="8A6D1E"/>
                 </a:solidFill>
                 <a:latin typeface="Amiri" pitchFamily="2" charset="-78"/>
+                <a:ea typeface="Amiri" pitchFamily="2" charset="-78"/>
                 <a:cs typeface="Amiri" pitchFamily="2" charset="-78"/>
               </a:rPr>
               <a:t>اسْتِمَارَةُ الاشْتِرَاكِ فِي النَّادِي الرِّيَاضِيِّ</a:t>
@@ -18487,6 +18592,7 @@
                   <a:srgbClr val="1B3B6F"/>
                 </a:solidFill>
                 <a:latin typeface="Amiri" pitchFamily="2" charset="-78"/>
+                <a:ea typeface="Amiri" pitchFamily="2" charset="-78"/>
                 <a:cs typeface="Amiri" pitchFamily="2" charset="-78"/>
               </a:rPr>
               <a:t>الاسْمُ</a:t>
@@ -18731,6 +18837,7 @@
                   <a:srgbClr val="1B3B6F"/>
                 </a:solidFill>
                 <a:latin typeface="Amiri" pitchFamily="2" charset="-78"/>
+                <a:ea typeface="Amiri" pitchFamily="2" charset="-78"/>
                 <a:cs typeface="Amiri" pitchFamily="2" charset="-78"/>
               </a:rPr>
               <a:t>العُمْرُ</a:t>
@@ -18975,6 +19082,7 @@
                   <a:srgbClr val="1B3B6F"/>
                 </a:solidFill>
                 <a:latin typeface="Amiri" pitchFamily="2" charset="-78"/>
+                <a:ea typeface="Amiri" pitchFamily="2" charset="-78"/>
                 <a:cs typeface="Amiri" pitchFamily="2" charset="-78"/>
               </a:rPr>
               <a:t>الرِّيَاضَةُ المُفَضَّلَةُ</a:t>
@@ -19219,6 +19327,7 @@
                   <a:srgbClr val="1B3B6F"/>
                 </a:solidFill>
                 <a:latin typeface="Amiri" pitchFamily="2" charset="-78"/>
+                <a:ea typeface="Amiri" pitchFamily="2" charset="-78"/>
                 <a:cs typeface="Amiri" pitchFamily="2" charset="-78"/>
               </a:rPr>
               <a:t>الأَيَّامُ المُنَاسِبَةُ</a:t>
@@ -19463,6 +19572,7 @@
                   <a:srgbClr val="1B3B6F"/>
                 </a:solidFill>
                 <a:latin typeface="Amiri" pitchFamily="2" charset="-78"/>
+                <a:ea typeface="Amiri" pitchFamily="2" charset="-78"/>
                 <a:cs typeface="Amiri" pitchFamily="2" charset="-78"/>
               </a:rPr>
               <a:t>الوَقْتُ المُنَاسِبُ</a:t>
@@ -19707,6 +19817,7 @@
                   <a:srgbClr val="1B3B6F"/>
                 </a:solidFill>
                 <a:latin typeface="Amiri" pitchFamily="2" charset="-78"/>
+                <a:ea typeface="Amiri" pitchFamily="2" charset="-78"/>
                 <a:cs typeface="Amiri" pitchFamily="2" charset="-78"/>
               </a:rPr>
               <a:t>مُشْكِلَةٌ صِحِّيَّةٌ (إِنْ وُجِدَتْ)</a:t>
@@ -19951,6 +20062,7 @@
                   <a:srgbClr val="1B3B6F"/>
                 </a:solidFill>
                 <a:latin typeface="Amiri" pitchFamily="2" charset="-78"/>
+                <a:ea typeface="Amiri" pitchFamily="2" charset="-78"/>
                 <a:cs typeface="Amiri" pitchFamily="2" charset="-78"/>
               </a:rPr>
               <a:t>وَجْبَتُكَ قَبْلَ الرِّيَاضَةِ</a:t>
@@ -20130,6 +20242,7 @@
                   <a:srgbClr val="1B3B6F"/>
                 </a:solidFill>
                 <a:latin typeface="Amiri" pitchFamily="2" charset="-78"/>
+                <a:ea typeface="Amiri" pitchFamily="2" charset="-78"/>
                 <a:cs typeface="Amiri" pitchFamily="2" charset="-78"/>
               </a:rPr>
               <a:t>جُمْلَةٌ: لِمَاذَا تُرِيدُ الاشْتِرَاكَ؟</a:t>
@@ -20339,6 +20452,7 @@
                   <a:srgbClr val="D4AF37"/>
                 </a:solidFill>
                 <a:latin typeface="Amiri" pitchFamily="2" charset="-78"/>
+                <a:ea typeface="Amiri" pitchFamily="2" charset="-78"/>
                 <a:cs typeface="Amiri" pitchFamily="2" charset="-78"/>
               </a:rPr>
               <a:t>م</a:t>
@@ -20659,6 +20773,7 @@
                   <a:srgbClr val="8A6D1E"/>
                 </a:solidFill>
                 <a:latin typeface="Amiri" pitchFamily="2" charset="-78"/>
+                <a:ea typeface="Amiri" pitchFamily="2" charset="-78"/>
                 <a:cs typeface="Amiri" pitchFamily="2" charset="-78"/>
               </a:rPr>
               <a:t>نَمُوذَجُ الإِجَابَةِ</a:t>
@@ -20977,6 +21092,7 @@
                   <a:srgbClr val="1B3B6F"/>
                 </a:solidFill>
                 <a:latin typeface="Amiri" pitchFamily="2" charset="-78"/>
+                <a:ea typeface="Amiri" pitchFamily="2" charset="-78"/>
                 <a:cs typeface="Amiri" pitchFamily="2" charset="-78"/>
               </a:rPr>
               <a:t>زَكَرِيَّا حُسَيْنٌ</a:t>
@@ -21015,6 +21131,7 @@
                   <a:srgbClr val="1B3B6F"/>
                 </a:solidFill>
                 <a:latin typeface="Amiri" pitchFamily="2" charset="-78"/>
+                <a:ea typeface="Amiri" pitchFamily="2" charset="-78"/>
                 <a:cs typeface="Amiri" pitchFamily="2" charset="-78"/>
               </a:rPr>
               <a:t>الاسْمُ</a:t>
@@ -21156,6 +21273,7 @@
                   <a:srgbClr val="1B3B6F"/>
                 </a:solidFill>
                 <a:latin typeface="Amiri" pitchFamily="2" charset="-78"/>
+                <a:ea typeface="Amiri" pitchFamily="2" charset="-78"/>
                 <a:cs typeface="Amiri" pitchFamily="2" charset="-78"/>
               </a:rPr>
               <a:t>سِتَّ عَشْرَةَ سَنَةً</a:t>
@@ -21194,6 +21312,7 @@
                   <a:srgbClr val="1B3B6F"/>
                 </a:solidFill>
                 <a:latin typeface="Amiri" pitchFamily="2" charset="-78"/>
+                <a:ea typeface="Amiri" pitchFamily="2" charset="-78"/>
                 <a:cs typeface="Amiri" pitchFamily="2" charset="-78"/>
               </a:rPr>
               <a:t>العُمْرُ</a:t>
@@ -21335,6 +21454,7 @@
                   <a:srgbClr val="1B3B6F"/>
                 </a:solidFill>
                 <a:latin typeface="Amiri" pitchFamily="2" charset="-78"/>
+                <a:ea typeface="Amiri" pitchFamily="2" charset="-78"/>
                 <a:cs typeface="Amiri" pitchFamily="2" charset="-78"/>
               </a:rPr>
               <a:t>كُرَةُ السَّلَّةِ</a:t>
@@ -21373,6 +21493,7 @@
                   <a:srgbClr val="1B3B6F"/>
                 </a:solidFill>
                 <a:latin typeface="Amiri" pitchFamily="2" charset="-78"/>
+                <a:ea typeface="Amiri" pitchFamily="2" charset="-78"/>
                 <a:cs typeface="Amiri" pitchFamily="2" charset="-78"/>
               </a:rPr>
               <a:t>الرِّيَاضَةُ المُفَضَّلَةُ</a:t>
@@ -21514,6 +21635,7 @@
                   <a:srgbClr val="1B3B6F"/>
                 </a:solidFill>
                 <a:latin typeface="Amiri" pitchFamily="2" charset="-78"/>
+                <a:ea typeface="Amiri" pitchFamily="2" charset="-78"/>
                 <a:cs typeface="Amiri" pitchFamily="2" charset="-78"/>
               </a:rPr>
               <a:t>الثُّلَاثَاءُ وَالسَّبْتُ</a:t>
@@ -21552,6 +21674,7 @@
                   <a:srgbClr val="1B3B6F"/>
                 </a:solidFill>
                 <a:latin typeface="Amiri" pitchFamily="2" charset="-78"/>
+                <a:ea typeface="Amiri" pitchFamily="2" charset="-78"/>
                 <a:cs typeface="Amiri" pitchFamily="2" charset="-78"/>
               </a:rPr>
               <a:t>الأَيَّامُ المُنَاسِبَةُ</a:t>
@@ -21693,6 +21816,7 @@
                   <a:srgbClr val="1B3B6F"/>
                 </a:solidFill>
                 <a:latin typeface="Amiri" pitchFamily="2" charset="-78"/>
+                <a:ea typeface="Amiri" pitchFamily="2" charset="-78"/>
                 <a:cs typeface="Amiri" pitchFamily="2" charset="-78"/>
               </a:rPr>
               <a:t>السَّاعَةُ الخَامِسَةُ مَسَاءً</a:t>
@@ -21731,6 +21855,7 @@
                   <a:srgbClr val="1B3B6F"/>
                 </a:solidFill>
                 <a:latin typeface="Amiri" pitchFamily="2" charset="-78"/>
+                <a:ea typeface="Amiri" pitchFamily="2" charset="-78"/>
                 <a:cs typeface="Amiri" pitchFamily="2" charset="-78"/>
               </a:rPr>
               <a:t>الوَقْتُ المُنَاسِبُ</a:t>
@@ -21872,6 +21997,7 @@
                   <a:srgbClr val="1B3B6F"/>
                 </a:solidFill>
                 <a:latin typeface="Amiri" pitchFamily="2" charset="-78"/>
+                <a:ea typeface="Amiri" pitchFamily="2" charset="-78"/>
                 <a:cs typeface="Amiri" pitchFamily="2" charset="-78"/>
               </a:rPr>
               <a:t>لَا تُوجَدُ</a:t>
@@ -21910,6 +22036,7 @@
                   <a:srgbClr val="1B3B6F"/>
                 </a:solidFill>
                 <a:latin typeface="Amiri" pitchFamily="2" charset="-78"/>
+                <a:ea typeface="Amiri" pitchFamily="2" charset="-78"/>
                 <a:cs typeface="Amiri" pitchFamily="2" charset="-78"/>
               </a:rPr>
               <a:t>مُشْكِلَةٌ صِحِّيَّةٌ (إِنْ وُجِدَتْ)</a:t>
@@ -22051,6 +22178,7 @@
                   <a:srgbClr val="1B3B6F"/>
                 </a:solidFill>
                 <a:latin typeface="Amiri" pitchFamily="2" charset="-78"/>
+                <a:ea typeface="Amiri" pitchFamily="2" charset="-78"/>
                 <a:cs typeface="Amiri" pitchFamily="2" charset="-78"/>
               </a:rPr>
               <a:t>مَوْزٌ وَمَاءٌ</a:t>
@@ -22089,6 +22217,7 @@
                   <a:srgbClr val="1B3B6F"/>
                 </a:solidFill>
                 <a:latin typeface="Amiri" pitchFamily="2" charset="-78"/>
+                <a:ea typeface="Amiri" pitchFamily="2" charset="-78"/>
                 <a:cs typeface="Amiri" pitchFamily="2" charset="-78"/>
               </a:rPr>
               <a:t>وَجْبَتُكَ قَبْلَ الرِّيَاضَةِ</a:t>
@@ -22230,6 +22359,7 @@
                   <a:srgbClr val="1B3B6F"/>
                 </a:solidFill>
                 <a:latin typeface="Amiri" pitchFamily="2" charset="-78"/>
+                <a:ea typeface="Amiri" pitchFamily="2" charset="-78"/>
                 <a:cs typeface="Amiri" pitchFamily="2" charset="-78"/>
               </a:rPr>
               <a:t>أُرِيدُ أَنْ أَكُونَ أَكْثَرَ نَشَاطًا، لِأَنِّي أَجْلِسُ كَثِيرًا أَمَامَ الحَاسُوبِ.</a:t>
@@ -22268,6 +22398,7 @@
                   <a:srgbClr val="1B3B6F"/>
                 </a:solidFill>
                 <a:latin typeface="Amiri" pitchFamily="2" charset="-78"/>
+                <a:ea typeface="Amiri" pitchFamily="2" charset="-78"/>
                 <a:cs typeface="Amiri" pitchFamily="2" charset="-78"/>
               </a:rPr>
               <a:t>جُمْلَةٌ: لِمَاذَا تُرِيدُ الاشْتِرَاكَ؟</a:t>
@@ -22477,6 +22608,7 @@
                   <a:srgbClr val="D4AF37"/>
                 </a:solidFill>
                 <a:latin typeface="Amiri" pitchFamily="2" charset="-78"/>
+                <a:ea typeface="Amiri" pitchFamily="2" charset="-78"/>
                 <a:cs typeface="Amiri" pitchFamily="2" charset="-78"/>
               </a:rPr>
               <a:t>م</a:t>
@@ -22797,6 +22929,7 @@
                   <a:srgbClr val="8A6D1E"/>
                 </a:solidFill>
                 <a:latin typeface="Amiri" pitchFamily="2" charset="-78"/>
+                <a:ea typeface="Amiri" pitchFamily="2" charset="-78"/>
                 <a:cs typeface="Amiri" pitchFamily="2" charset="-78"/>
               </a:rPr>
               <a:t>رُوتِينِي الجَدِيدُ</a:t>
@@ -23272,6 +23405,7 @@
                   <a:srgbClr val="1B3B6F"/>
                 </a:solidFill>
                 <a:latin typeface="Amiri" pitchFamily="2" charset="-78"/>
+                <a:ea typeface="Amiri" pitchFamily="2" charset="-78"/>
                 <a:cs typeface="Amiri" pitchFamily="2" charset="-78"/>
               </a:rPr>
               <a:t>أَسْتَيْقِظُ فِي … ثُمَّ …</a:t>
@@ -23348,6 +23482,7 @@
                   <a:srgbClr val="1B3B6F"/>
                 </a:solidFill>
                 <a:latin typeface="Amiri" pitchFamily="2" charset="-78"/>
+                <a:ea typeface="Amiri" pitchFamily="2" charset="-78"/>
                 <a:cs typeface="Amiri" pitchFamily="2" charset="-78"/>
               </a:rPr>
               <a:t>أَذْهَبُ إِلَى المَدْرَسَةِ … وَتَسْتَغْرِقُ الرِّحْلَةُ …</a:t>
@@ -23424,6 +23559,7 @@
                   <a:srgbClr val="1B3B6F"/>
                 </a:solidFill>
                 <a:latin typeface="Amiri" pitchFamily="2" charset="-78"/>
+                <a:ea typeface="Amiri" pitchFamily="2" charset="-78"/>
                 <a:cs typeface="Amiri" pitchFamily="2" charset="-78"/>
               </a:rPr>
               <a:t>كُنْتُ … أَمَّا الآنَ فَأَنَامُ …</a:t>
@@ -23500,6 +23636,7 @@
                   <a:srgbClr val="1B3B6F"/>
                 </a:solidFill>
                 <a:latin typeface="Amiri" pitchFamily="2" charset="-78"/>
+                <a:ea typeface="Amiri" pitchFamily="2" charset="-78"/>
                 <a:cs typeface="Amiri" pitchFamily="2" charset="-78"/>
               </a:rPr>
               <a:t>فِي الصَّيْفِ سَأَلْعَبُ …</a:t>
@@ -23671,6 +23808,7 @@
                   <a:srgbClr val="D4AF37"/>
                 </a:solidFill>
                 <a:latin typeface="Amiri" pitchFamily="2" charset="-78"/>
+                <a:ea typeface="Amiri" pitchFamily="2" charset="-78"/>
                 <a:cs typeface="Amiri" pitchFamily="2" charset="-78"/>
               </a:rPr>
               <a:t>م</a:t>
@@ -23991,6 +24129,7 @@
                   <a:srgbClr val="8A6D1E"/>
                 </a:solidFill>
                 <a:latin typeface="Amiri" pitchFamily="2" charset="-78"/>
+                <a:ea typeface="Amiri" pitchFamily="2" charset="-78"/>
                 <a:cs typeface="Amiri" pitchFamily="2" charset="-78"/>
               </a:rPr>
               <a:t>نَصُّ السُّؤَالِ</a:t>
@@ -24271,6 +24410,7 @@
                   <a:srgbClr val="1B3B6F"/>
                 </a:solidFill>
                 <a:latin typeface="Amiri" pitchFamily="2" charset="-78"/>
+                <a:ea typeface="Amiri" pitchFamily="2" charset="-78"/>
                 <a:cs typeface="Amiri" pitchFamily="2" charset="-78"/>
               </a:rPr>
               <a:t>اكْتُبْ رِسَالَةً إِلَى صَدِيقِكَ عَنْ رُوتِينِكَ اليَوْمِيِّ (٨٠–٩٠ كَلِمَةً).</a:t>
@@ -24412,6 +24552,7 @@
                   <a:srgbClr val="1B3B6F"/>
                 </a:solidFill>
                 <a:latin typeface="Amiri" pitchFamily="2" charset="-78"/>
+                <a:ea typeface="Amiri" pitchFamily="2" charset="-78"/>
                 <a:cs typeface="Amiri" pitchFamily="2" charset="-78"/>
               </a:rPr>
               <a:t>مَتَى تَسْتَيْقِظُ؟ وَمَاذَا تَفْعَلُ فِي الصَّبَاحِ؟</a:t>
@@ -24553,6 +24694,7 @@
                   <a:srgbClr val="1B3B6F"/>
                 </a:solidFill>
                 <a:latin typeface="Amiri" pitchFamily="2" charset="-78"/>
+                <a:ea typeface="Amiri" pitchFamily="2" charset="-78"/>
                 <a:cs typeface="Amiri" pitchFamily="2" charset="-78"/>
               </a:rPr>
               <a:t>كَيْفَ تَذْهَبُ إِلَى المَدْرَسَةِ؟ وَمَاذَا تَأْكُلُ؟</a:t>
@@ -24694,6 +24836,7 @@
                   <a:srgbClr val="1B3B6F"/>
                 </a:solidFill>
                 <a:latin typeface="Amiri" pitchFamily="2" charset="-78"/>
+                <a:ea typeface="Amiri" pitchFamily="2" charset="-78"/>
                 <a:cs typeface="Amiri" pitchFamily="2" charset="-78"/>
               </a:rPr>
               <a:t>مَاذَا غَيَّرْتَ فِي رُوتِينِكَ؟ وَلِمَاذَا؟</a:t>
@@ -24835,6 +24978,7 @@
                   <a:srgbClr val="1B3B6F"/>
                 </a:solidFill>
                 <a:latin typeface="Amiri" pitchFamily="2" charset="-78"/>
+                <a:ea typeface="Amiri" pitchFamily="2" charset="-78"/>
                 <a:cs typeface="Amiri" pitchFamily="2" charset="-78"/>
               </a:rPr>
               <a:t>مَا رَأْيُكَ؟ وَمَا خِطَطُكَ لِلْعُطْلَةِ؟ وَاسْأَلْ صَدِيقَكَ سُؤَالًا.</a:t>
@@ -25044,6 +25188,7 @@
                   <a:srgbClr val="D4AF37"/>
                 </a:solidFill>
                 <a:latin typeface="Amiri" pitchFamily="2" charset="-78"/>
+                <a:ea typeface="Amiri" pitchFamily="2" charset="-78"/>
                 <a:cs typeface="Amiri" pitchFamily="2" charset="-78"/>
               </a:rPr>
               <a:t>م</a:t>
@@ -25364,6 +25509,7 @@
                   <a:srgbClr val="8A6D1E"/>
                 </a:solidFill>
                 <a:latin typeface="Amiri" pitchFamily="2" charset="-78"/>
+                <a:ea typeface="Amiri" pitchFamily="2" charset="-78"/>
                 <a:cs typeface="Amiri" pitchFamily="2" charset="-78"/>
               </a:rPr>
               <a:t>قَوَالِبُ الكِتَابَةِ</a:t>
@@ -25644,6 +25790,7 @@
                   <a:srgbClr val="1B3B6F"/>
                 </a:solidFill>
                 <a:latin typeface="Amiri" pitchFamily="2" charset="-78"/>
+                <a:ea typeface="Amiri" pitchFamily="2" charset="-78"/>
                 <a:cs typeface="Amiri" pitchFamily="2" charset="-78"/>
               </a:rPr>
               <a:t>مَرْحَبًا يَا ______ ، كَيْفَ حَالُكَ؟</a:t>
@@ -25850,6 +25997,7 @@
                   <a:srgbClr val="1B3B6F"/>
                 </a:solidFill>
                 <a:latin typeface="Amiri" pitchFamily="2" charset="-78"/>
+                <a:ea typeface="Amiri" pitchFamily="2" charset="-78"/>
                 <a:cs typeface="Amiri" pitchFamily="2" charset="-78"/>
               </a:rPr>
               <a:t>أَسْتَيْقِظُ فِي ______ ، ثُمَّ ______ .</a:t>
@@ -26056,6 +26204,7 @@
                   <a:srgbClr val="1B3B6F"/>
                 </a:solidFill>
                 <a:latin typeface="Amiri" pitchFamily="2" charset="-78"/>
+                <a:ea typeface="Amiri" pitchFamily="2" charset="-78"/>
                 <a:cs typeface="Amiri" pitchFamily="2" charset="-78"/>
               </a:rPr>
               <a:t>أَذْهَبُ إِلَى المَدْرَسَةِ ______ . آكُلُ ______ دَائِمًا.</a:t>
@@ -26262,6 +26411,7 @@
                   <a:srgbClr val="1B3B6F"/>
                 </a:solidFill>
                 <a:latin typeface="Amiri" pitchFamily="2" charset="-78"/>
+                <a:ea typeface="Amiri" pitchFamily="2" charset="-78"/>
                 <a:cs typeface="Amiri" pitchFamily="2" charset="-78"/>
               </a:rPr>
               <a:t>كُنْتُ ______ ، أَمَّا الآنَ فَأَنَامُ ______ ، لِأَنَّ ______ .</a:t>
@@ -26468,6 +26618,7 @@
                   <a:srgbClr val="1B3B6F"/>
                 </a:solidFill>
                 <a:latin typeface="Amiri" pitchFamily="2" charset="-78"/>
+                <a:ea typeface="Amiri" pitchFamily="2" charset="-78"/>
                 <a:cs typeface="Amiri" pitchFamily="2" charset="-78"/>
               </a:rPr>
               <a:t>أَظُنُّ أَنَّ ______ . فِي الصَّيْفِ سَأَلْعَبُ ______ .</a:t>
@@ -26674,6 +26825,7 @@
                   <a:srgbClr val="1B3B6F"/>
                 </a:solidFill>
                 <a:latin typeface="Amiri" pitchFamily="2" charset="-78"/>
+                <a:ea typeface="Amiri" pitchFamily="2" charset="-78"/>
                 <a:cs typeface="Amiri" pitchFamily="2" charset="-78"/>
               </a:rPr>
               <a:t>وَأَنْتَ، ______ ؟ مَعَ السَّلَامَةِ.</a:t>
@@ -26913,13 +27065,9 @@
     <a:fontScheme name="Office">
       <a:majorFont>
         <a:latin typeface="Calibri Light" panose="020F0302020204030204"/>
-        <a:ea typeface=""/>
-        <a:cs typeface=""/>
-        <a:font script="Jpan" typeface="游ゴシック Light"/>
-        <a:font script="Hang" typeface="맑은 고딕"/>
-        <a:font script="Hans" typeface="等线 Light"/>
-        <a:font script="Hant" typeface="新細明體"/>
-        <a:font script="Arab" typeface="Times New Roman"/>
+        <a:ea typeface="Amiri" pitchFamily="2" charset="-78"/>
+        <a:cs typeface="Amiri" pitchFamily="2" charset="-78"/>
+        <a:font script="Arab" typeface="Amiri"/>
         <a:font script="Hebr" typeface="Times New Roman"/>
         <a:font script="Thai" typeface="Angsana New"/>
         <a:font script="Ethi" typeface="Nyala"/>
@@ -26965,13 +27113,9 @@
       </a:majorFont>
       <a:minorFont>
         <a:latin typeface="Calibri" panose="020F0502020204030204"/>
-        <a:ea typeface=""/>
-        <a:cs typeface=""/>
-        <a:font script="Jpan" typeface="游ゴシック"/>
-        <a:font script="Hang" typeface="맑은 고딕"/>
-        <a:font script="Hans" typeface="等线"/>
-        <a:font script="Hant" typeface="新細明體"/>
-        <a:font script="Arab" typeface="Arial"/>
+        <a:ea typeface="Amiri" pitchFamily="2" charset="-78"/>
+        <a:cs typeface="Amiri" pitchFamily="2" charset="-78"/>
+        <a:font script="Arab" typeface="Amiri"/>
         <a:font script="Hebr" typeface="Arial"/>
         <a:font script="Thai" typeface="Cordia New"/>
         <a:font script="Ethi" typeface="Nyala"/>

--- a/Final_Revision/Exam_Practice/FR-L01_Writing_Workshop_Daily_Life_Food_and_Health.pptx
+++ b/Final_Revision/Exam_Practice/FR-L01_Writing_Workshop_Daily_Life_Food_and_Health.pptx
@@ -3848,7 +3848,7 @@
                 <a:solidFill>
                   <a:srgbClr val="FFFFFF"/>
                 </a:solidFill>
-                <a:latin typeface="Calibri" pitchFamily="34" charset="0"/>
+                <a:latin typeface="Amiri" pitchFamily="2" charset="-78"/>
                 <a:ea typeface="Amiri" pitchFamily="2" charset="-78"/>
                 <a:cs typeface="Amiri" pitchFamily="2" charset="-78"/>
               </a:rPr>
@@ -3914,7 +3914,7 @@
                 <a:solidFill>
                   <a:srgbClr val="FFFFFF"/>
                 </a:solidFill>
-                <a:latin typeface="Calibri" pitchFamily="34" charset="0"/>
+                <a:latin typeface="Amiri" pitchFamily="2" charset="-78"/>
                 <a:ea typeface="Amiri" pitchFamily="2" charset="-78"/>
                 <a:cs typeface="Amiri" pitchFamily="2" charset="-78"/>
               </a:rPr>
@@ -3980,7 +3980,7 @@
                 <a:solidFill>
                   <a:srgbClr val="FFFFFF"/>
                 </a:solidFill>
-                <a:latin typeface="Calibri" pitchFamily="34" charset="0"/>
+                <a:latin typeface="Amiri" pitchFamily="2" charset="-78"/>
                 <a:ea typeface="Amiri" pitchFamily="2" charset="-78"/>
                 <a:cs typeface="Amiri" pitchFamily="2" charset="-78"/>
               </a:rPr>
@@ -4046,7 +4046,7 @@
                 <a:solidFill>
                   <a:srgbClr val="FFFFFF"/>
                 </a:solidFill>
-                <a:latin typeface="Calibri" pitchFamily="34" charset="0"/>
+                <a:latin typeface="Amiri" pitchFamily="2" charset="-78"/>
                 <a:ea typeface="Amiri" pitchFamily="2" charset="-78"/>
                 <a:cs typeface="Amiri" pitchFamily="2" charset="-78"/>
               </a:rPr>
@@ -4844,7 +4844,7 @@
                 <a:solidFill>
                   <a:srgbClr val="FFFFFF"/>
                 </a:solidFill>
-                <a:latin typeface="Calibri" pitchFamily="34" charset="0"/>
+                <a:latin typeface="Amiri" pitchFamily="2" charset="-78"/>
                 <a:ea typeface="Amiri" pitchFamily="2" charset="-78"/>
                 <a:cs typeface="Amiri" pitchFamily="2" charset="-78"/>
               </a:rPr>
@@ -4910,7 +4910,7 @@
                 <a:solidFill>
                   <a:srgbClr val="FFFFFF"/>
                 </a:solidFill>
-                <a:latin typeface="Calibri" pitchFamily="34" charset="0"/>
+                <a:latin typeface="Amiri" pitchFamily="2" charset="-78"/>
                 <a:ea typeface="Amiri" pitchFamily="2" charset="-78"/>
                 <a:cs typeface="Amiri" pitchFamily="2" charset="-78"/>
               </a:rPr>
@@ -4976,7 +4976,7 @@
                 <a:solidFill>
                   <a:srgbClr val="FFFFFF"/>
                 </a:solidFill>
-                <a:latin typeface="Calibri" pitchFamily="34" charset="0"/>
+                <a:latin typeface="Amiri" pitchFamily="2" charset="-78"/>
                 <a:ea typeface="Amiri" pitchFamily="2" charset="-78"/>
                 <a:cs typeface="Amiri" pitchFamily="2" charset="-78"/>
               </a:rPr>
@@ -5042,7 +5042,7 @@
                 <a:solidFill>
                   <a:srgbClr val="FFFFFF"/>
                 </a:solidFill>
-                <a:latin typeface="Calibri" pitchFamily="34" charset="0"/>
+                <a:latin typeface="Amiri" pitchFamily="2" charset="-78"/>
                 <a:ea typeface="Amiri" pitchFamily="2" charset="-78"/>
                 <a:cs typeface="Amiri" pitchFamily="2" charset="-78"/>
               </a:rPr>
@@ -8599,7 +8599,7 @@
                 <a:solidFill>
                   <a:srgbClr val="FFFFFF"/>
                 </a:solidFill>
-                <a:latin typeface="Calibri" pitchFamily="34" charset="0"/>
+                <a:latin typeface="Amiri" pitchFamily="2" charset="-78"/>
                 <a:ea typeface="Amiri" pitchFamily="2" charset="-78"/>
                 <a:cs typeface="Amiri" pitchFamily="2" charset="-78"/>
               </a:rPr>
@@ -8665,7 +8665,7 @@
                 <a:solidFill>
                   <a:srgbClr val="FFFFFF"/>
                 </a:solidFill>
-                <a:latin typeface="Calibri" pitchFamily="34" charset="0"/>
+                <a:latin typeface="Amiri" pitchFamily="2" charset="-78"/>
                 <a:ea typeface="Amiri" pitchFamily="2" charset="-78"/>
                 <a:cs typeface="Amiri" pitchFamily="2" charset="-78"/>
               </a:rPr>
@@ -8731,7 +8731,7 @@
                 <a:solidFill>
                   <a:srgbClr val="FFFFFF"/>
                 </a:solidFill>
-                <a:latin typeface="Calibri" pitchFamily="34" charset="0"/>
+                <a:latin typeface="Amiri" pitchFamily="2" charset="-78"/>
                 <a:ea typeface="Amiri" pitchFamily="2" charset="-78"/>
                 <a:cs typeface="Amiri" pitchFamily="2" charset="-78"/>
               </a:rPr>
@@ -8797,7 +8797,7 @@
                 <a:solidFill>
                   <a:srgbClr val="FFFFFF"/>
                 </a:solidFill>
-                <a:latin typeface="Calibri" pitchFamily="34" charset="0"/>
+                <a:latin typeface="Amiri" pitchFamily="2" charset="-78"/>
                 <a:ea typeface="Amiri" pitchFamily="2" charset="-78"/>
                 <a:cs typeface="Amiri" pitchFamily="2" charset="-78"/>
               </a:rPr>
@@ -9584,7 +9584,7 @@
                 <a:solidFill>
                   <a:srgbClr val="FFFFFF"/>
                 </a:solidFill>
-                <a:latin typeface="Calibri" pitchFamily="34" charset="0"/>
+                <a:latin typeface="Amiri" pitchFamily="2" charset="-78"/>
                 <a:ea typeface="Amiri" pitchFamily="2" charset="-78"/>
                 <a:cs typeface="Amiri" pitchFamily="2" charset="-78"/>
               </a:rPr>
@@ -9650,7 +9650,7 @@
                 <a:solidFill>
                   <a:srgbClr val="FFFFFF"/>
                 </a:solidFill>
-                <a:latin typeface="Calibri" pitchFamily="34" charset="0"/>
+                <a:latin typeface="Amiri" pitchFamily="2" charset="-78"/>
                 <a:ea typeface="Amiri" pitchFamily="2" charset="-78"/>
                 <a:cs typeface="Amiri" pitchFamily="2" charset="-78"/>
               </a:rPr>
@@ -9716,7 +9716,7 @@
                 <a:solidFill>
                   <a:srgbClr val="FFFFFF"/>
                 </a:solidFill>
-                <a:latin typeface="Calibri" pitchFamily="34" charset="0"/>
+                <a:latin typeface="Amiri" pitchFamily="2" charset="-78"/>
                 <a:ea typeface="Amiri" pitchFamily="2" charset="-78"/>
                 <a:cs typeface="Amiri" pitchFamily="2" charset="-78"/>
               </a:rPr>
@@ -9782,7 +9782,7 @@
                 <a:solidFill>
                   <a:srgbClr val="FFFFFF"/>
                 </a:solidFill>
-                <a:latin typeface="Calibri" pitchFamily="34" charset="0"/>
+                <a:latin typeface="Amiri" pitchFamily="2" charset="-78"/>
                 <a:ea typeface="Amiri" pitchFamily="2" charset="-78"/>
                 <a:cs typeface="Amiri" pitchFamily="2" charset="-78"/>
               </a:rPr>
@@ -10569,7 +10569,7 @@
                 <a:solidFill>
                   <a:srgbClr val="FFFFFF"/>
                 </a:solidFill>
-                <a:latin typeface="Calibri" pitchFamily="34" charset="0"/>
+                <a:latin typeface="Amiri" pitchFamily="2" charset="-78"/>
                 <a:ea typeface="Amiri" pitchFamily="2" charset="-78"/>
                 <a:cs typeface="Amiri" pitchFamily="2" charset="-78"/>
               </a:rPr>
@@ -10635,7 +10635,7 @@
                 <a:solidFill>
                   <a:srgbClr val="FFFFFF"/>
                 </a:solidFill>
-                <a:latin typeface="Calibri" pitchFamily="34" charset="0"/>
+                <a:latin typeface="Amiri" pitchFamily="2" charset="-78"/>
                 <a:ea typeface="Amiri" pitchFamily="2" charset="-78"/>
                 <a:cs typeface="Amiri" pitchFamily="2" charset="-78"/>
               </a:rPr>
@@ -10701,7 +10701,7 @@
                 <a:solidFill>
                   <a:srgbClr val="FFFFFF"/>
                 </a:solidFill>
-                <a:latin typeface="Calibri" pitchFamily="34" charset="0"/>
+                <a:latin typeface="Amiri" pitchFamily="2" charset="-78"/>
                 <a:ea typeface="Amiri" pitchFamily="2" charset="-78"/>
                 <a:cs typeface="Amiri" pitchFamily="2" charset="-78"/>
               </a:rPr>
@@ -10767,7 +10767,7 @@
                 <a:solidFill>
                   <a:srgbClr val="FFFFFF"/>
                 </a:solidFill>
-                <a:latin typeface="Calibri" pitchFamily="34" charset="0"/>
+                <a:latin typeface="Amiri" pitchFamily="2" charset="-78"/>
                 <a:ea typeface="Amiri" pitchFamily="2" charset="-78"/>
                 <a:cs typeface="Amiri" pitchFamily="2" charset="-78"/>
               </a:rPr>
